--- a/entregables/presentaciones/IQS_B4_Cinematica_Estatica.pptx
+++ b/entregables/presentaciones/IQS_B4_Cinematica_Estatica.pptx
@@ -17934,7 +17934,7 @@
                 <a:ea typeface="Calibri" pitchFamily="34" charset="-122"/>
                 <a:cs typeface="Calibri" pitchFamily="34" charset="-120"/>
               </a:rPr>
-              <a:t>Corke, 2023, pp. 48-59 · Lynch y Park, 2017, pp. 77-84</a:t>
+              <a:t>Corke, 2023, pp. 48-59 · Lynch y Park, 2017, ap. B, pp. 575-582</a:t>
             </a:r>
             <a:endParaRPr lang="en-US" sz="1000" dirty="0"/>
           </a:p>

--- a/entregables/presentaciones/IQS_B4_Cinematica_Estatica.pptx
+++ b/entregables/presentaciones/IQS_B4_Cinematica_Estatica.pptx
@@ -4407,7 +4407,7 @@
                 <a:ea typeface="Calibri" pitchFamily="34" charset="-122"/>
                 <a:cs typeface="Calibri" pitchFamily="34" charset="-120"/>
               </a:rPr>
-              <a:t>Ejercicio por parejas: para el 2R, escribir (i) la ETS, (ii) la tabla DH y (iii) M, S1 y S2 del PoE; comprobar que las tres dan la misma T(q) en q = (30°, 40°): t = (1.21, 1.44), orientación 70° (Corke, p. 258).</a:t>
+              <a:t>Ejercicio por parejas: para el 2R, escribir (i) la ETS, (ii) la tabla DH y (iii) M, S1 y S2 del PoE; comprobar que las tres dan la misma T(q) en el 2R del libro, de eslabones de 1 m, en q = (30°, 40°): t = (1.21, 1.44), orientación 70° (Corke, p. 258).</a:t>
             </a:r>
             <a:endParaRPr lang="en-US" sz="1150" dirty="0"/>
           </a:p>
@@ -5988,7 +5988,7 @@
                 <a:ea typeface="Calibri" pitchFamily="34" charset="-122"/>
                 <a:cs typeface="Calibri" pitchFamily="34" charset="-120"/>
               </a:rPr>
-              <a:t>Desacoplo: la posición del centro de muñeca depende solo de q1-q3; la orientación restante la resuelven q4-q6 (extraer Euler ZYX).</a:t>
+              <a:t>Desacoplo: la posición del centro de muñeca depende solo de q1-q3; la orientación restante la resuelven q4-q6 (extraer Euler ZYX, convención de Lynch y Park; la muñeca del 6R genérico de Corke es ZYZ).</a:t>
             </a:r>
             <a:endParaRPr lang="en-US" sz="1400" dirty="0"/>
           </a:p>
@@ -6113,7 +6113,7 @@
                 <a:ea typeface="Calibri" pitchFamily="34" charset="-122"/>
                 <a:cs typeface="Calibri" pitchFamily="34" charset="-120"/>
               </a:rPr>
-              <a:t>Pose fuera de alcance → sin solución. Objetivo con px = py = 0 → infinitas soluciones de theta1. Y «por límites articulares y colisiones no las ocho soluciones son físicamente alcanzables».</a:t>
+              <a:t>Pose fuera de alcance → sin solución. Objetivo con px = py = 0 → infinitas soluciones de theta1. Y «por límites articulares y colisiones no todas las ocho soluciones son físicamente alcanzables».</a:t>
             </a:r>
             <a:endParaRPr lang="en-US" sz="1250" dirty="0"/>
           </a:p>

--- a/entregables/presentaciones/IQS_B4_Cinematica_Estatica.pptx
+++ b/entregables/presentaciones/IQS_B4_Cinematica_Estatica.pptx
@@ -5045,6 +5045,43 @@
           </a:p>
         </p:txBody>
       </p:sp>
+      <p:sp>
+        <p:nvSpPr>
+          <p:cNvPr id="8" name="TextBox 7">
+            <a:hlinkClick r:id="rId3"/>
+          </p:cNvPr>
+          <p:cNvSpPr txBox="1"/>
+          <p:nvPr/>
+        </p:nvSpPr>
+        <p:spPr>
+          <a:xfrm>
+            <a:off x="2057400" y="3310128"/>
+            <a:ext cx="5486400" cy="347472"/>
+          </a:xfrm>
+          <a:prstGeom prst="rect">
+            <a:avLst/>
+          </a:prstGeom>
+          <a:noFill/>
+        </p:spPr>
+        <p:txBody>
+          <a:bodyPr wrap="square" lIns="0" tIns="0" bIns="0" rIns="0">
+            <a:noAutofit/>
+          </a:bodyPr>
+          <a:lstStyle/>
+          <a:p>
+            <a:pPr algn="l"/>
+            <a:r>
+              <a:rPr sz="1400" b="1">
+                <a:solidFill>
+                  <a:srgbClr val="2FD26E"/>
+                </a:solidFill>
+                <a:latin typeface="Calibri"/>
+              </a:rPr>
+              <a:t>▸  Abrir en Colab · cuaderno S15</a:t>
+            </a:r>
+          </a:p>
+        </p:txBody>
+      </p:sp>
     </p:spTree>
   </p:cSld>
   <p:clrMapOvr>
@@ -5776,6 +5813,43 @@
           </a:p>
         </p:txBody>
       </p:sp>
+      <p:sp>
+        <p:nvSpPr>
+          <p:cNvPr id="8" name="TextBox 7">
+            <a:hlinkClick r:id="rId3"/>
+          </p:cNvPr>
+          <p:cNvSpPr txBox="1"/>
+          <p:nvPr/>
+        </p:nvSpPr>
+        <p:spPr>
+          <a:xfrm>
+            <a:off x="2057400" y="3310128"/>
+            <a:ext cx="5486400" cy="347472"/>
+          </a:xfrm>
+          <a:prstGeom prst="rect">
+            <a:avLst/>
+          </a:prstGeom>
+          <a:noFill/>
+        </p:spPr>
+        <p:txBody>
+          <a:bodyPr wrap="square" lIns="0" tIns="0" bIns="0" rIns="0">
+            <a:noAutofit/>
+          </a:bodyPr>
+          <a:lstStyle/>
+          <a:p>
+            <a:pPr algn="l"/>
+            <a:r>
+              <a:rPr sz="1400" b="1">
+                <a:solidFill>
+                  <a:srgbClr val="2FD26E"/>
+                </a:solidFill>
+                <a:latin typeface="Calibri"/>
+              </a:rPr>
+              <a:t>▸  Abrir en Colab · cuaderno S16</a:t>
+            </a:r>
+          </a:p>
+        </p:txBody>
+      </p:sp>
     </p:spTree>
   </p:cSld>
   <p:clrMapOvr>
@@ -8204,6 +8278,43 @@
           </a:p>
         </p:txBody>
       </p:sp>
+      <p:sp>
+        <p:nvSpPr>
+          <p:cNvPr id="8" name="TextBox 7">
+            <a:hlinkClick r:id="rId3"/>
+          </p:cNvPr>
+          <p:cNvSpPr txBox="1"/>
+          <p:nvPr/>
+        </p:nvSpPr>
+        <p:spPr>
+          <a:xfrm>
+            <a:off x="2057400" y="3310128"/>
+            <a:ext cx="5486400" cy="347472"/>
+          </a:xfrm>
+          <a:prstGeom prst="rect">
+            <a:avLst/>
+          </a:prstGeom>
+          <a:noFill/>
+        </p:spPr>
+        <p:txBody>
+          <a:bodyPr wrap="square" lIns="0" tIns="0" bIns="0" rIns="0">
+            <a:noAutofit/>
+          </a:bodyPr>
+          <a:lstStyle/>
+          <a:p>
+            <a:pPr algn="l"/>
+            <a:r>
+              <a:rPr sz="1400" b="1">
+                <a:solidFill>
+                  <a:srgbClr val="2FD26E"/>
+                </a:solidFill>
+                <a:latin typeface="Calibri"/>
+              </a:rPr>
+              <a:t>▸  Abrir en Colab · cuaderno S17</a:t>
+            </a:r>
+          </a:p>
+        </p:txBody>
+      </p:sp>
     </p:spTree>
   </p:cSld>
   <p:clrMapOvr>
@@ -11847,6 +11958,43 @@
           </a:p>
         </p:txBody>
       </p:sp>
+      <p:sp>
+        <p:nvSpPr>
+          <p:cNvPr id="8" name="TextBox 7">
+            <a:hlinkClick r:id="rId3"/>
+          </p:cNvPr>
+          <p:cNvSpPr txBox="1"/>
+          <p:nvPr/>
+        </p:nvSpPr>
+        <p:spPr>
+          <a:xfrm>
+            <a:off x="2057400" y="3310128"/>
+            <a:ext cx="5486400" cy="347472"/>
+          </a:xfrm>
+          <a:prstGeom prst="rect">
+            <a:avLst/>
+          </a:prstGeom>
+          <a:noFill/>
+        </p:spPr>
+        <p:txBody>
+          <a:bodyPr wrap="square" lIns="0" tIns="0" bIns="0" rIns="0">
+            <a:noAutofit/>
+          </a:bodyPr>
+          <a:lstStyle/>
+          <a:p>
+            <a:pPr algn="l"/>
+            <a:r>
+              <a:rPr sz="1400" b="1">
+                <a:solidFill>
+                  <a:srgbClr val="2FD26E"/>
+                </a:solidFill>
+                <a:latin typeface="Calibri"/>
+              </a:rPr>
+              <a:t>▸  Abrir en Colab · cuaderno S18</a:t>
+            </a:r>
+          </a:p>
+        </p:txBody>
+      </p:sp>
     </p:spTree>
   </p:cSld>
   <p:clrMapOvr>
@@ -12735,6 +12883,43 @@
           </a:p>
         </p:txBody>
       </p:sp>
+      <p:sp>
+        <p:nvSpPr>
+          <p:cNvPr id="12" name="TextBox 11">
+            <a:hlinkClick r:id="rId4"/>
+          </p:cNvPr>
+          <p:cNvSpPr txBox="1"/>
+          <p:nvPr/>
+        </p:nvSpPr>
+        <p:spPr>
+          <a:xfrm>
+            <a:off x="2057400" y="3310128"/>
+            <a:ext cx="5486400" cy="347472"/>
+          </a:xfrm>
+          <a:prstGeom prst="rect">
+            <a:avLst/>
+          </a:prstGeom>
+          <a:noFill/>
+        </p:spPr>
+        <p:txBody>
+          <a:bodyPr wrap="square" lIns="0" tIns="0" bIns="0" rIns="0">
+            <a:noAutofit/>
+          </a:bodyPr>
+          <a:lstStyle/>
+          <a:p>
+            <a:pPr algn="l"/>
+            <a:r>
+              <a:rPr sz="1400" b="1">
+                <a:solidFill>
+                  <a:srgbClr val="2FD26E"/>
+                </a:solidFill>
+                <a:latin typeface="Calibri"/>
+              </a:rPr>
+              <a:t>▸  Abrir en Colab · cuaderno S19</a:t>
+            </a:r>
+          </a:p>
+        </p:txBody>
+      </p:sp>
     </p:spTree>
   </p:cSld>
   <p:clrMapOvr>
@@ -16295,6 +16480,43 @@
           </a:p>
         </p:txBody>
       </p:sp>
+      <p:sp>
+        <p:nvSpPr>
+          <p:cNvPr id="12" name="TextBox 11">
+            <a:hlinkClick r:id="rId4"/>
+          </p:cNvPr>
+          <p:cNvSpPr txBox="1"/>
+          <p:nvPr/>
+        </p:nvSpPr>
+        <p:spPr>
+          <a:xfrm>
+            <a:off x="2057400" y="3310128"/>
+            <a:ext cx="5486400" cy="347472"/>
+          </a:xfrm>
+          <a:prstGeom prst="rect">
+            <a:avLst/>
+          </a:prstGeom>
+          <a:noFill/>
+        </p:spPr>
+        <p:txBody>
+          <a:bodyPr wrap="square" lIns="0" tIns="0" bIns="0" rIns="0">
+            <a:noAutofit/>
+          </a:bodyPr>
+          <a:lstStyle/>
+          <a:p>
+            <a:pPr algn="l"/>
+            <a:r>
+              <a:rPr sz="1400" b="1">
+                <a:solidFill>
+                  <a:srgbClr val="2FD26E"/>
+                </a:solidFill>
+                <a:latin typeface="Calibri"/>
+              </a:rPr>
+              <a:t>▸  Abrir en Colab · cuaderno S13</a:t>
+            </a:r>
+          </a:p>
+        </p:txBody>
+      </p:sp>
     </p:spTree>
   </p:cSld>
   <p:clrMapOvr>
@@ -19115,6 +19337,43 @@
               <a:t>El problema FK · ETS · Denavit-Hartenberg · producto de exponenciales</a:t>
             </a:r>
             <a:endParaRPr lang="en-US" sz="1600" dirty="0"/>
+          </a:p>
+        </p:txBody>
+      </p:sp>
+      <p:sp>
+        <p:nvSpPr>
+          <p:cNvPr id="8" name="TextBox 7">
+            <a:hlinkClick r:id="rId3"/>
+          </p:cNvPr>
+          <p:cNvSpPr txBox="1"/>
+          <p:nvPr/>
+        </p:nvSpPr>
+        <p:spPr>
+          <a:xfrm>
+            <a:off x="2057400" y="3310128"/>
+            <a:ext cx="5486400" cy="347472"/>
+          </a:xfrm>
+          <a:prstGeom prst="rect">
+            <a:avLst/>
+          </a:prstGeom>
+          <a:noFill/>
+        </p:spPr>
+        <p:txBody>
+          <a:bodyPr wrap="square" lIns="0" tIns="0" bIns="0" rIns="0">
+            <a:noAutofit/>
+          </a:bodyPr>
+          <a:lstStyle/>
+          <a:p>
+            <a:pPr algn="l"/>
+            <a:r>
+              <a:rPr sz="1400" b="1">
+                <a:solidFill>
+                  <a:srgbClr val="2FD26E"/>
+                </a:solidFill>
+                <a:latin typeface="Calibri"/>
+              </a:rPr>
+              <a:t>▸  Abrir en Colab · cuaderno S14</a:t>
+            </a:r>
           </a:p>
         </p:txBody>
       </p:sp>
